--- a/Presentation.pptx
+++ b/Presentation.pptx
@@ -225,7 +225,7 @@
           <a:p>
             <a:fld id="{831A2EBF-38CC-41CC-8845-D52A43580C34}" type="datetimeFigureOut">
               <a:rPr lang="it-IT" smtClean="0"/>
-              <a:t>23/04/2026</a:t>
+              <a:t>24/04/2026</a:t>
             </a:fld>
             <a:endParaRPr lang="it-IT" dirty="0"/>
           </a:p>
@@ -2104,7 +2104,7 @@
           <a:p>
             <a:fld id="{1B0EF195-71D2-4E51-8F71-5848C8970B32}" type="datetimeFigureOut">
               <a:rPr lang="it-IT" smtClean="0"/>
-              <a:t>23/04/2026</a:t>
+              <a:t>24/04/2026</a:t>
             </a:fld>
             <a:endParaRPr lang="it-IT" dirty="0"/>
           </a:p>
@@ -2304,7 +2304,7 @@
           <a:p>
             <a:fld id="{1B0EF195-71D2-4E51-8F71-5848C8970B32}" type="datetimeFigureOut">
               <a:rPr lang="it-IT" smtClean="0"/>
-              <a:t>23/04/2026</a:t>
+              <a:t>24/04/2026</a:t>
             </a:fld>
             <a:endParaRPr lang="it-IT" dirty="0"/>
           </a:p>
@@ -2514,7 +2514,7 @@
           <a:p>
             <a:fld id="{1B0EF195-71D2-4E51-8F71-5848C8970B32}" type="datetimeFigureOut">
               <a:rPr lang="it-IT" smtClean="0"/>
-              <a:t>23/04/2026</a:t>
+              <a:t>24/04/2026</a:t>
             </a:fld>
             <a:endParaRPr lang="it-IT" dirty="0"/>
           </a:p>
@@ -2714,7 +2714,7 @@
           <a:p>
             <a:fld id="{1B0EF195-71D2-4E51-8F71-5848C8970B32}" type="datetimeFigureOut">
               <a:rPr lang="it-IT" smtClean="0"/>
-              <a:t>23/04/2026</a:t>
+              <a:t>24/04/2026</a:t>
             </a:fld>
             <a:endParaRPr lang="it-IT" dirty="0"/>
           </a:p>
@@ -2990,7 +2990,7 @@
           <a:p>
             <a:fld id="{1B0EF195-71D2-4E51-8F71-5848C8970B32}" type="datetimeFigureOut">
               <a:rPr lang="it-IT" smtClean="0"/>
-              <a:t>23/04/2026</a:t>
+              <a:t>24/04/2026</a:t>
             </a:fld>
             <a:endParaRPr lang="it-IT" dirty="0"/>
           </a:p>
@@ -3258,7 +3258,7 @@
           <a:p>
             <a:fld id="{1B0EF195-71D2-4E51-8F71-5848C8970B32}" type="datetimeFigureOut">
               <a:rPr lang="it-IT" smtClean="0"/>
-              <a:t>23/04/2026</a:t>
+              <a:t>24/04/2026</a:t>
             </a:fld>
             <a:endParaRPr lang="it-IT" dirty="0"/>
           </a:p>
@@ -3673,7 +3673,7 @@
           <a:p>
             <a:fld id="{1B0EF195-71D2-4E51-8F71-5848C8970B32}" type="datetimeFigureOut">
               <a:rPr lang="it-IT" smtClean="0"/>
-              <a:t>23/04/2026</a:t>
+              <a:t>24/04/2026</a:t>
             </a:fld>
             <a:endParaRPr lang="it-IT" dirty="0"/>
           </a:p>
@@ -3815,7 +3815,7 @@
           <a:p>
             <a:fld id="{1B0EF195-71D2-4E51-8F71-5848C8970B32}" type="datetimeFigureOut">
               <a:rPr lang="it-IT" smtClean="0"/>
-              <a:t>23/04/2026</a:t>
+              <a:t>24/04/2026</a:t>
             </a:fld>
             <a:endParaRPr lang="it-IT" dirty="0"/>
           </a:p>
@@ -3928,7 +3928,7 @@
           <a:p>
             <a:fld id="{1B0EF195-71D2-4E51-8F71-5848C8970B32}" type="datetimeFigureOut">
               <a:rPr lang="it-IT" smtClean="0"/>
-              <a:t>23/04/2026</a:t>
+              <a:t>24/04/2026</a:t>
             </a:fld>
             <a:endParaRPr lang="it-IT" dirty="0"/>
           </a:p>
@@ -4241,7 +4241,7 @@
           <a:p>
             <a:fld id="{1B0EF195-71D2-4E51-8F71-5848C8970B32}" type="datetimeFigureOut">
               <a:rPr lang="it-IT" smtClean="0"/>
-              <a:t>23/04/2026</a:t>
+              <a:t>24/04/2026</a:t>
             </a:fld>
             <a:endParaRPr lang="it-IT" dirty="0"/>
           </a:p>
@@ -4530,7 +4530,7 @@
           <a:p>
             <a:fld id="{1B0EF195-71D2-4E51-8F71-5848C8970B32}" type="datetimeFigureOut">
               <a:rPr lang="it-IT" smtClean="0"/>
-              <a:t>23/04/2026</a:t>
+              <a:t>24/04/2026</a:t>
             </a:fld>
             <a:endParaRPr lang="it-IT" dirty="0"/>
           </a:p>
@@ -4773,7 +4773,7 @@
           <a:p>
             <a:fld id="{1B0EF195-71D2-4E51-8F71-5848C8970B32}" type="datetimeFigureOut">
               <a:rPr lang="it-IT" smtClean="0"/>
-              <a:t>23/04/2026</a:t>
+              <a:t>24/04/2026</a:t>
             </a:fld>
             <a:endParaRPr lang="it-IT" dirty="0"/>
           </a:p>
@@ -6849,18 +6849,6 @@
   <p:clrMapOvr>
     <a:masterClrMapping/>
   </p:clrMapOvr>
-  <mc:AlternateContent xmlns:mc="http://schemas.openxmlformats.org/markup-compatibility/2006">
-    <mc:Choice xmlns:p159="http://schemas.microsoft.com/office/powerpoint/2015/09/main" Requires="p159">
-      <p:transition xmlns:p14="http://schemas.microsoft.com/office/powerpoint/2010/main" spd="slow" p14:dur="1500">
-        <p159:morph option="byObject"/>
-      </p:transition>
-    </mc:Choice>
-    <mc:Fallback>
-      <p:transition spd="slow">
-        <p:fade/>
-      </p:transition>
-    </mc:Fallback>
-  </mc:AlternateContent>
 </p:sld>
 </file>
 
@@ -8285,13 +8273,13 @@
   <p:clrMapOvr>
     <a:masterClrMapping/>
   </p:clrMapOvr>
-  <mc:AlternateContent xmlns:mc="http://schemas.openxmlformats.org/markup-compatibility/2006">
-    <mc:Choice xmlns:p159="http://schemas.microsoft.com/office/powerpoint/2015/09/main" Requires="p159">
+  <mc:AlternateContent xmlns:mc="http://schemas.openxmlformats.org/markup-compatibility/2006" xmlns:p159="http://schemas.microsoft.com/office/powerpoint/2015/09/main">
+    <mc:Choice Requires="p159">
       <p:transition xmlns:p14="http://schemas.microsoft.com/office/powerpoint/2010/main" spd="slow" p14:dur="1500">
         <p159:morph option="byObject"/>
       </p:transition>
     </mc:Choice>
-    <mc:Fallback>
+    <mc:Fallback xmlns="">
       <p:transition spd="slow">
         <p:fade/>
       </p:transition>
@@ -9200,13 +9188,13 @@
   <p:clrMapOvr>
     <a:masterClrMapping/>
   </p:clrMapOvr>
-  <mc:AlternateContent xmlns:mc="http://schemas.openxmlformats.org/markup-compatibility/2006">
-    <mc:Choice xmlns:p159="http://schemas.microsoft.com/office/powerpoint/2015/09/main" Requires="p159">
+  <mc:AlternateContent xmlns:mc="http://schemas.openxmlformats.org/markup-compatibility/2006" xmlns:p159="http://schemas.microsoft.com/office/powerpoint/2015/09/main">
+    <mc:Choice Requires="p159">
       <p:transition xmlns:p14="http://schemas.microsoft.com/office/powerpoint/2010/main" spd="slow" p14:dur="1500">
         <p159:morph option="byObject"/>
       </p:transition>
     </mc:Choice>
-    <mc:Fallback>
+    <mc:Fallback xmlns="">
       <p:transition spd="slow">
         <p:fade/>
       </p:transition>
@@ -21171,8 +21159,8 @@
           </a:p>
         </p:txBody>
       </p:sp>
-      <mc:AlternateContent xmlns:mc="http://schemas.openxmlformats.org/markup-compatibility/2006">
-        <mc:Choice xmlns:a14="http://schemas.microsoft.com/office/drawing/2010/main" Requires="a14">
+      <mc:AlternateContent xmlns:mc="http://schemas.openxmlformats.org/markup-compatibility/2006" xmlns:a14="http://schemas.microsoft.com/office/drawing/2010/main">
+        <mc:Choice Requires="a14">
           <p:sp>
             <p:nvSpPr>
               <p:cNvPr id="78" name="TextBox 77">
@@ -21311,7 +21299,7 @@
             </p:txBody>
           </p:sp>
         </mc:Choice>
-        <mc:Fallback>
+        <mc:Fallback xmlns="">
           <p:sp>
             <p:nvSpPr>
               <p:cNvPr id="78" name="TextBox 77">
@@ -21983,8 +21971,8 @@
           </a:p>
         </p:txBody>
       </p:sp>
-      <mc:AlternateContent xmlns:mc="http://schemas.openxmlformats.org/markup-compatibility/2006">
-        <mc:Choice xmlns:a14="http://schemas.microsoft.com/office/drawing/2010/main" Requires="a14">
+      <mc:AlternateContent xmlns:mc="http://schemas.openxmlformats.org/markup-compatibility/2006" xmlns:a14="http://schemas.microsoft.com/office/drawing/2010/main">
+        <mc:Choice Requires="a14">
           <p:sp>
             <p:nvSpPr>
               <p:cNvPr id="71" name="TextBox 70">
@@ -22115,7 +22103,7 @@
             </p:txBody>
           </p:sp>
         </mc:Choice>
-        <mc:Fallback>
+        <mc:Fallback xmlns="">
           <p:sp>
             <p:nvSpPr>
               <p:cNvPr id="71" name="TextBox 70">
@@ -22256,8 +22244,8 @@
           </a:p>
         </p:txBody>
       </p:sp>
-      <mc:AlternateContent xmlns:mc="http://schemas.openxmlformats.org/markup-compatibility/2006">
-        <mc:Choice xmlns:a14="http://schemas.microsoft.com/office/drawing/2010/main" Requires="a14">
+      <mc:AlternateContent xmlns:mc="http://schemas.openxmlformats.org/markup-compatibility/2006" xmlns:a14="http://schemas.microsoft.com/office/drawing/2010/main">
+        <mc:Choice Requires="a14">
           <p:sp>
             <p:nvSpPr>
               <p:cNvPr id="75" name="TextBox 74">
@@ -22388,7 +22376,7 @@
             </p:txBody>
           </p:sp>
         </mc:Choice>
-        <mc:Fallback>
+        <mc:Fallback xmlns="">
           <p:sp>
             <p:nvSpPr>
               <p:cNvPr id="75" name="TextBox 74">
@@ -22536,8 +22524,8 @@
           </a:p>
         </p:txBody>
       </p:sp>
-      <mc:AlternateContent xmlns:mc="http://schemas.openxmlformats.org/markup-compatibility/2006">
-        <mc:Choice xmlns:a14="http://schemas.microsoft.com/office/drawing/2010/main" Requires="a14">
+      <mc:AlternateContent xmlns:mc="http://schemas.openxmlformats.org/markup-compatibility/2006" xmlns:a14="http://schemas.microsoft.com/office/drawing/2010/main">
+        <mc:Choice Requires="a14">
           <p:sp>
             <p:nvSpPr>
               <p:cNvPr id="78" name="TextBox 77">
@@ -22679,7 +22667,7 @@
             </p:txBody>
           </p:sp>
         </mc:Choice>
-        <mc:Fallback>
+        <mc:Fallback xmlns="">
           <p:sp>
             <p:nvSpPr>
               <p:cNvPr id="78" name="TextBox 77">
@@ -22862,13 +22850,13 @@
   <p:clrMapOvr>
     <a:masterClrMapping/>
   </p:clrMapOvr>
-  <mc:AlternateContent xmlns:mc="http://schemas.openxmlformats.org/markup-compatibility/2006">
-    <mc:Choice xmlns:p159="http://schemas.microsoft.com/office/powerpoint/2015/09/main" Requires="p159">
+  <mc:AlternateContent xmlns:mc="http://schemas.openxmlformats.org/markup-compatibility/2006" xmlns:p159="http://schemas.microsoft.com/office/powerpoint/2015/09/main">
+    <mc:Choice Requires="p159">
       <p:transition xmlns:p14="http://schemas.microsoft.com/office/powerpoint/2010/main" spd="slow" p14:dur="1500">
         <p159:morph option="byWord"/>
       </p:transition>
     </mc:Choice>
-    <mc:Fallback>
+    <mc:Fallback xmlns="">
       <p:transition spd="slow">
         <p:fade/>
       </p:transition>
@@ -23483,8 +23471,8 @@
           </a:p>
         </p:txBody>
       </p:sp>
-      <mc:AlternateContent xmlns:mc="http://schemas.openxmlformats.org/markup-compatibility/2006">
-        <mc:Choice xmlns:a14="http://schemas.microsoft.com/office/drawing/2010/main" Requires="a14">
+      <mc:AlternateContent xmlns:mc="http://schemas.openxmlformats.org/markup-compatibility/2006" xmlns:a14="http://schemas.microsoft.com/office/drawing/2010/main">
+        <mc:Choice Requires="a14">
           <p:sp>
             <p:nvSpPr>
               <p:cNvPr id="78" name="TextBox 77">
@@ -23626,7 +23614,7 @@
             </p:txBody>
           </p:sp>
         </mc:Choice>
-        <mc:Fallback>
+        <mc:Fallback xmlns="">
           <p:sp>
             <p:nvSpPr>
               <p:cNvPr id="78" name="TextBox 77">
@@ -23840,13 +23828,13 @@
   <p:clrMapOvr>
     <a:masterClrMapping/>
   </p:clrMapOvr>
-  <mc:AlternateContent xmlns:mc="http://schemas.openxmlformats.org/markup-compatibility/2006">
-    <mc:Choice xmlns:p159="http://schemas.microsoft.com/office/powerpoint/2015/09/main" Requires="p159">
+  <mc:AlternateContent xmlns:mc="http://schemas.openxmlformats.org/markup-compatibility/2006" xmlns:p159="http://schemas.microsoft.com/office/powerpoint/2015/09/main">
+    <mc:Choice Requires="p159">
       <p:transition xmlns:p14="http://schemas.microsoft.com/office/powerpoint/2010/main" spd="slow" p14:dur="1500">
         <p159:morph option="byObject"/>
       </p:transition>
     </mc:Choice>
-    <mc:Fallback>
+    <mc:Fallback xmlns="">
       <p:transition spd="slow">
         <p:fade/>
       </p:transition>
@@ -25283,13 +25271,13 @@
   <p:clrMapOvr>
     <a:masterClrMapping/>
   </p:clrMapOvr>
-  <mc:AlternateContent xmlns:mc="http://schemas.openxmlformats.org/markup-compatibility/2006">
-    <mc:Choice xmlns:p159="http://schemas.microsoft.com/office/powerpoint/2015/09/main" Requires="p159">
+  <mc:AlternateContent xmlns:mc="http://schemas.openxmlformats.org/markup-compatibility/2006" xmlns:p159="http://schemas.microsoft.com/office/powerpoint/2015/09/main">
+    <mc:Choice Requires="p159">
       <p:transition xmlns:p14="http://schemas.microsoft.com/office/powerpoint/2010/main" spd="slow" p14:dur="1500">
         <p159:morph option="byObject"/>
       </p:transition>
     </mc:Choice>
-    <mc:Fallback>
+    <mc:Fallback xmlns="">
       <p:transition spd="slow">
         <p:fade/>
       </p:transition>

--- a/Presentation.pptx
+++ b/Presentation.pptx
@@ -6322,8 +6322,12 @@
           <a:p>
             <a:pPr algn="ctr"/>
             <a:r>
+              <a:rPr lang="en-US" b="1" dirty="0"/>
+              <a:t>Strong</a:t>
+            </a:r>
+            <a:r>
               <a:rPr lang="en-US" dirty="0"/>
-              <a:t>Strong push toward low binding energy</a:t>
+              <a:t> push toward low binding energy</a:t>
             </a:r>
           </a:p>
         </p:txBody>
@@ -6492,8 +6496,12 @@
           <a:p>
             <a:pPr algn="ctr"/>
             <a:r>
+              <a:rPr lang="en-US" b="1" dirty="0"/>
+              <a:t>Constant</a:t>
+            </a:r>
+            <a:r>
               <a:rPr lang="en-US" dirty="0"/>
-              <a:t>Constant gradient based on the score minus a threshold</a:t>
+              <a:t> gradient based on the score minus a threshold</a:t>
             </a:r>
           </a:p>
         </p:txBody>
@@ -6662,8 +6670,20 @@
           <a:p>
             <a:pPr algn="ctr"/>
             <a:r>
+              <a:rPr lang="en-US" b="1" dirty="0"/>
+              <a:t>Gentle at first </a:t>
+            </a:r>
+            <a:r>
               <a:rPr lang="en-US" dirty="0"/>
-              <a:t>Gentle at first but becomes aggressive as scores approach zero</a:t>
+              <a:t>but becomes </a:t>
+            </a:r>
+            <a:r>
+              <a:rPr lang="en-US" b="1" dirty="0"/>
+              <a:t>aggressive</a:t>
+            </a:r>
+            <a:r>
+              <a:rPr lang="en-US" dirty="0"/>
+              <a:t> as scores approach zero</a:t>
             </a:r>
           </a:p>
         </p:txBody>
@@ -6832,8 +6852,12 @@
           <a:p>
             <a:pPr algn="ctr"/>
             <a:r>
+              <a:rPr lang="en-US" b="1" dirty="0"/>
+              <a:t>Heavily</a:t>
+            </a:r>
+            <a:r>
               <a:rPr lang="en-US" dirty="0"/>
-              <a:t>Heavily punishes low-quality molecules</a:t>
+              <a:t> punishes low-quality molecules</a:t>
             </a:r>
             <a:endParaRPr lang="en-US" b="1" dirty="0"/>
           </a:p>
@@ -6849,6 +6873,9 @@
   <p:clrMapOvr>
     <a:masterClrMapping/>
   </p:clrMapOvr>
+  <p:transition spd="slow">
+    <p:wipe/>
+  </p:transition>
 </p:sld>
 </file>
 
